--- a/b-Office/项目报告.pptx
+++ b/b-Office/项目报告.pptx
@@ -282,7 +282,7 @@
           <a:p>
             <a:fld id="{581A1311-718C-4E8E-8010-28C99C476D3E}" type="datetimeFigureOut">
               <a:rPr lang="zh-CN" altLang="en-US" smtClean="0"/>
-              <a:t>2025/11/14</a:t>
+              <a:t>2026/7/6</a:t>
             </a:fld>
             <a:endParaRPr lang="zh-CN" altLang="en-US"/>
           </a:p>
@@ -480,7 +480,7 @@
           <a:p>
             <a:fld id="{581A1311-718C-4E8E-8010-28C99C476D3E}" type="datetimeFigureOut">
               <a:rPr lang="zh-CN" altLang="en-US" smtClean="0"/>
-              <a:t>2025/11/14</a:t>
+              <a:t>2026/7/6</a:t>
             </a:fld>
             <a:endParaRPr lang="zh-CN" altLang="en-US"/>
           </a:p>
@@ -688,7 +688,7 @@
           <a:p>
             <a:fld id="{581A1311-718C-4E8E-8010-28C99C476D3E}" type="datetimeFigureOut">
               <a:rPr lang="zh-CN" altLang="en-US" smtClean="0"/>
-              <a:t>2025/11/14</a:t>
+              <a:t>2026/7/6</a:t>
             </a:fld>
             <a:endParaRPr lang="zh-CN" altLang="en-US"/>
           </a:p>
@@ -886,7 +886,7 @@
           <a:p>
             <a:fld id="{581A1311-718C-4E8E-8010-28C99C476D3E}" type="datetimeFigureOut">
               <a:rPr lang="zh-CN" altLang="en-US" smtClean="0"/>
-              <a:t>2025/11/14</a:t>
+              <a:t>2026/7/6</a:t>
             </a:fld>
             <a:endParaRPr lang="zh-CN" altLang="en-US"/>
           </a:p>
@@ -1161,7 +1161,7 @@
           <a:p>
             <a:fld id="{581A1311-718C-4E8E-8010-28C99C476D3E}" type="datetimeFigureOut">
               <a:rPr lang="zh-CN" altLang="en-US" smtClean="0"/>
-              <a:t>2025/11/14</a:t>
+              <a:t>2026/7/6</a:t>
             </a:fld>
             <a:endParaRPr lang="zh-CN" altLang="en-US"/>
           </a:p>
@@ -1426,7 +1426,7 @@
           <a:p>
             <a:fld id="{581A1311-718C-4E8E-8010-28C99C476D3E}" type="datetimeFigureOut">
               <a:rPr lang="zh-CN" altLang="en-US" smtClean="0"/>
-              <a:t>2025/11/14</a:t>
+              <a:t>2026/7/6</a:t>
             </a:fld>
             <a:endParaRPr lang="zh-CN" altLang="en-US"/>
           </a:p>
@@ -1838,7 +1838,7 @@
           <a:p>
             <a:fld id="{581A1311-718C-4E8E-8010-28C99C476D3E}" type="datetimeFigureOut">
               <a:rPr lang="zh-CN" altLang="en-US" smtClean="0"/>
-              <a:t>2025/11/14</a:t>
+              <a:t>2026/7/6</a:t>
             </a:fld>
             <a:endParaRPr lang="zh-CN" altLang="en-US"/>
           </a:p>
@@ -1979,7 +1979,7 @@
           <a:p>
             <a:fld id="{581A1311-718C-4E8E-8010-28C99C476D3E}" type="datetimeFigureOut">
               <a:rPr lang="zh-CN" altLang="en-US" smtClean="0"/>
-              <a:t>2025/11/14</a:t>
+              <a:t>2026/7/6</a:t>
             </a:fld>
             <a:endParaRPr lang="zh-CN" altLang="en-US"/>
           </a:p>
@@ -2092,7 +2092,7 @@
           <a:p>
             <a:fld id="{581A1311-718C-4E8E-8010-28C99C476D3E}" type="datetimeFigureOut">
               <a:rPr lang="zh-CN" altLang="en-US" smtClean="0"/>
-              <a:t>2025/11/14</a:t>
+              <a:t>2026/7/6</a:t>
             </a:fld>
             <a:endParaRPr lang="zh-CN" altLang="en-US"/>
           </a:p>
@@ -2403,7 +2403,7 @@
           <a:p>
             <a:fld id="{581A1311-718C-4E8E-8010-28C99C476D3E}" type="datetimeFigureOut">
               <a:rPr lang="zh-CN" altLang="en-US" smtClean="0"/>
-              <a:t>2025/11/14</a:t>
+              <a:t>2026/7/6</a:t>
             </a:fld>
             <a:endParaRPr lang="zh-CN" altLang="en-US"/>
           </a:p>
@@ -2691,7 +2691,7 @@
           <a:p>
             <a:fld id="{581A1311-718C-4E8E-8010-28C99C476D3E}" type="datetimeFigureOut">
               <a:rPr lang="zh-CN" altLang="en-US" smtClean="0"/>
-              <a:t>2025/11/14</a:t>
+              <a:t>2026/7/6</a:t>
             </a:fld>
             <a:endParaRPr lang="zh-CN" altLang="en-US"/>
           </a:p>
@@ -2932,7 +2932,7 @@
           <a:p>
             <a:fld id="{581A1311-718C-4E8E-8010-28C99C476D3E}" type="datetimeFigureOut">
               <a:rPr lang="zh-CN" altLang="en-US" smtClean="0"/>
-              <a:t>2025/11/14</a:t>
+              <a:t>2026/7/6</a:t>
             </a:fld>
             <a:endParaRPr lang="zh-CN" altLang="en-US"/>
           </a:p>
@@ -3620,7 +3620,7 @@
                 <a:latin typeface="Arial" panose="020B0604020202020204" pitchFamily="34" charset="0"/>
                 <a:cs typeface="Arial" panose="020B0604020202020204" pitchFamily="34" charset="0"/>
               </a:rPr>
-              <a:t>11/14/2025 10:54:57 AM</a:t>
+              <a:t>7/6/2026 6:24:31 PM</a:t>
             </a:fld>
             <a:endParaRPr lang="zh-CN" altLang="en-US" sz="1400" b="1" dirty="0">
               <a:solidFill>
@@ -3634,35 +3634,28 @@
       </p:sp>
       <p:pic>
         <p:nvPicPr>
-          <p:cNvPr id="2" name="图片 1" descr="徽标&#10;&#10;AI 生成的内容可能不正确。">
-            <a:extLst>
-              <a:ext uri="{FF2B5EF4-FFF2-40B4-BE49-F238E27FC236}">
-                <a16:creationId xmlns:a16="http://schemas.microsoft.com/office/drawing/2014/main" id="{5CC1B96B-F4FD-1310-5BA7-318A63CA8D5C}"/>
+          <p:cNvPr id="3" name="图片 2">
+            <a:extLst>
+              <a:ext uri="{FF2B5EF4-FFF2-40B4-BE49-F238E27FC236}">
+                <a16:creationId xmlns:a16="http://schemas.microsoft.com/office/drawing/2014/main" id="{D9112190-9BDB-4E61-23A6-C9C747C6078A}"/>
               </a:ext>
             </a:extLst>
           </p:cNvPr>
           <p:cNvPicPr>
-            <a:picLocks/>
+            <a:picLocks noChangeAspect="1"/>
           </p:cNvPicPr>
           <p:nvPr/>
         </p:nvPicPr>
         <p:blipFill>
-          <a:blip r:embed="rId2">
-            <a:extLst>
-              <a:ext uri="{28A0092B-C50C-407E-A947-70E740481C1C}">
-                <a14:useLocalDpi xmlns:a14="http://schemas.microsoft.com/office/drawing/2010/main" val="0"/>
-              </a:ext>
-            </a:extLst>
-          </a:blip>
-          <a:srcRect t="29985" b="27316"/>
+          <a:blip r:embed="rId2"/>
           <a:stretch>
             <a:fillRect/>
           </a:stretch>
         </p:blipFill>
         <p:spPr>
           <a:xfrm>
-            <a:off x="184195" y="166221"/>
-            <a:ext cx="1741461" cy="688543"/>
+            <a:off x="184195" y="111507"/>
+            <a:ext cx="1741460" cy="586009"/>
           </a:xfrm>
           <a:prstGeom prst="rect">
             <a:avLst/>
@@ -3876,35 +3869,28 @@
       </p:sp>
       <p:pic>
         <p:nvPicPr>
-          <p:cNvPr id="2" name="图片 1" descr="徽标&#10;&#10;AI 生成的内容可能不正确。">
-            <a:extLst>
-              <a:ext uri="{FF2B5EF4-FFF2-40B4-BE49-F238E27FC236}">
-                <a16:creationId xmlns:a16="http://schemas.microsoft.com/office/drawing/2014/main" id="{13C66E01-CEF4-4A60-178A-60CF8406C290}"/>
+          <p:cNvPr id="3" name="图片 2">
+            <a:extLst>
+              <a:ext uri="{FF2B5EF4-FFF2-40B4-BE49-F238E27FC236}">
+                <a16:creationId xmlns:a16="http://schemas.microsoft.com/office/drawing/2014/main" id="{8BE2E395-373B-5E05-D56D-F4D670F20BEB}"/>
               </a:ext>
             </a:extLst>
           </p:cNvPr>
           <p:cNvPicPr>
-            <a:picLocks/>
+            <a:picLocks noChangeAspect="1"/>
           </p:cNvPicPr>
           <p:nvPr/>
         </p:nvPicPr>
         <p:blipFill>
-          <a:blip r:embed="rId2">
-            <a:extLst>
-              <a:ext uri="{28A0092B-C50C-407E-A947-70E740481C1C}">
-                <a14:useLocalDpi xmlns:a14="http://schemas.microsoft.com/office/drawing/2010/main" val="0"/>
-              </a:ext>
-            </a:extLst>
-          </a:blip>
-          <a:srcRect t="29985" b="27316"/>
+          <a:blip r:embed="rId2"/>
           <a:stretch>
             <a:fillRect/>
           </a:stretch>
         </p:blipFill>
         <p:spPr>
           <a:xfrm>
-            <a:off x="184195" y="166221"/>
-            <a:ext cx="1741461" cy="688543"/>
+            <a:off x="184195" y="111507"/>
+            <a:ext cx="1741460" cy="586009"/>
           </a:xfrm>
           <a:prstGeom prst="rect">
             <a:avLst/>
@@ -4130,35 +4116,28 @@
       </p:sp>
       <p:pic>
         <p:nvPicPr>
-          <p:cNvPr id="2" name="图片 1" descr="徽标&#10;&#10;AI 生成的内容可能不正确。">
-            <a:extLst>
-              <a:ext uri="{FF2B5EF4-FFF2-40B4-BE49-F238E27FC236}">
-                <a16:creationId xmlns:a16="http://schemas.microsoft.com/office/drawing/2014/main" id="{6E82F45E-35AA-FBDA-9C6A-345E95D2DA9E}"/>
+          <p:cNvPr id="3" name="图片 2">
+            <a:extLst>
+              <a:ext uri="{FF2B5EF4-FFF2-40B4-BE49-F238E27FC236}">
+                <a16:creationId xmlns:a16="http://schemas.microsoft.com/office/drawing/2014/main" id="{56B19234-4326-6431-12DD-7EC4E609836B}"/>
               </a:ext>
             </a:extLst>
           </p:cNvPr>
           <p:cNvPicPr>
-            <a:picLocks/>
+            <a:picLocks noChangeAspect="1"/>
           </p:cNvPicPr>
           <p:nvPr/>
         </p:nvPicPr>
         <p:blipFill>
-          <a:blip r:embed="rId2">
-            <a:extLst>
-              <a:ext uri="{28A0092B-C50C-407E-A947-70E740481C1C}">
-                <a14:useLocalDpi xmlns:a14="http://schemas.microsoft.com/office/drawing/2010/main" val="0"/>
-              </a:ext>
-            </a:extLst>
-          </a:blip>
-          <a:srcRect t="29985" b="27316"/>
+          <a:blip r:embed="rId2"/>
           <a:stretch>
             <a:fillRect/>
           </a:stretch>
         </p:blipFill>
         <p:spPr>
           <a:xfrm>
-            <a:off x="184195" y="166221"/>
-            <a:ext cx="1741461" cy="688543"/>
+            <a:off x="184195" y="111507"/>
+            <a:ext cx="1741460" cy="586009"/>
           </a:xfrm>
           <a:prstGeom prst="rect">
             <a:avLst/>
@@ -4384,35 +4363,28 @@
       </p:sp>
       <p:pic>
         <p:nvPicPr>
-          <p:cNvPr id="2" name="图片 1" descr="徽标&#10;&#10;AI 生成的内容可能不正确。">
-            <a:extLst>
-              <a:ext uri="{FF2B5EF4-FFF2-40B4-BE49-F238E27FC236}">
-                <a16:creationId xmlns:a16="http://schemas.microsoft.com/office/drawing/2014/main" id="{CD2C38C8-149A-BDAE-8668-DA0517A8EF51}"/>
+          <p:cNvPr id="3" name="图片 2">
+            <a:extLst>
+              <a:ext uri="{FF2B5EF4-FFF2-40B4-BE49-F238E27FC236}">
+                <a16:creationId xmlns:a16="http://schemas.microsoft.com/office/drawing/2014/main" id="{AAAF458C-B99B-9902-B09C-2156F10AA992}"/>
               </a:ext>
             </a:extLst>
           </p:cNvPr>
           <p:cNvPicPr>
-            <a:picLocks/>
+            <a:picLocks noChangeAspect="1"/>
           </p:cNvPicPr>
           <p:nvPr/>
         </p:nvPicPr>
         <p:blipFill>
-          <a:blip r:embed="rId2">
-            <a:extLst>
-              <a:ext uri="{28A0092B-C50C-407E-A947-70E740481C1C}">
-                <a14:useLocalDpi xmlns:a14="http://schemas.microsoft.com/office/drawing/2010/main" val="0"/>
-              </a:ext>
-            </a:extLst>
-          </a:blip>
-          <a:srcRect t="29985" b="27316"/>
+          <a:blip r:embed="rId2"/>
           <a:stretch>
             <a:fillRect/>
           </a:stretch>
         </p:blipFill>
         <p:spPr>
           <a:xfrm>
-            <a:off x="184195" y="166221"/>
-            <a:ext cx="1741461" cy="688543"/>
+            <a:off x="184195" y="111507"/>
+            <a:ext cx="1741460" cy="586009"/>
           </a:xfrm>
           <a:prstGeom prst="rect">
             <a:avLst/>
@@ -4693,7 +4665,7 @@
                 <a:latin typeface="Arial" panose="020B0604020202020204" pitchFamily="34" charset="0"/>
                 <a:cs typeface="Arial" panose="020B0604020202020204" pitchFamily="34" charset="0"/>
               </a:rPr>
-              <a:t>11/14/2025 10:58:08 AM</a:t>
+              <a:t>7/6/2026 6:25:10 PM</a:t>
             </a:fld>
             <a:endParaRPr lang="zh-CN" altLang="en-US" sz="1400" b="1" dirty="0">
               <a:solidFill>
@@ -4743,35 +4715,28 @@
       </p:sp>
       <p:pic>
         <p:nvPicPr>
-          <p:cNvPr id="2" name="图片 1" descr="徽标&#10;&#10;AI 生成的内容可能不正确。">
-            <a:extLst>
-              <a:ext uri="{FF2B5EF4-FFF2-40B4-BE49-F238E27FC236}">
-                <a16:creationId xmlns:a16="http://schemas.microsoft.com/office/drawing/2014/main" id="{AA3F957F-24AE-94C9-BF68-E0C0B7232515}"/>
+          <p:cNvPr id="3" name="图片 2">
+            <a:extLst>
+              <a:ext uri="{FF2B5EF4-FFF2-40B4-BE49-F238E27FC236}">
+                <a16:creationId xmlns:a16="http://schemas.microsoft.com/office/drawing/2014/main" id="{A6EB9898-2E58-43B2-3E99-587047714FA7}"/>
               </a:ext>
             </a:extLst>
           </p:cNvPr>
           <p:cNvPicPr>
-            <a:picLocks/>
+            <a:picLocks noChangeAspect="1"/>
           </p:cNvPicPr>
           <p:nvPr/>
         </p:nvPicPr>
         <p:blipFill>
-          <a:blip r:embed="rId2">
-            <a:extLst>
-              <a:ext uri="{28A0092B-C50C-407E-A947-70E740481C1C}">
-                <a14:useLocalDpi xmlns:a14="http://schemas.microsoft.com/office/drawing/2010/main" val="0"/>
-              </a:ext>
-            </a:extLst>
-          </a:blip>
-          <a:srcRect t="29985" b="27316"/>
+          <a:blip r:embed="rId2"/>
           <a:stretch>
             <a:fillRect/>
           </a:stretch>
         </p:blipFill>
         <p:spPr>
           <a:xfrm>
-            <a:off x="184195" y="166221"/>
-            <a:ext cx="1741461" cy="688543"/>
+            <a:off x="184195" y="111507"/>
+            <a:ext cx="1741460" cy="586009"/>
           </a:xfrm>
           <a:prstGeom prst="rect">
             <a:avLst/>
@@ -4997,35 +4962,28 @@
       </p:sp>
       <p:pic>
         <p:nvPicPr>
-          <p:cNvPr id="2" name="图片 1" descr="徽标&#10;&#10;AI 生成的内容可能不正确。">
-            <a:extLst>
-              <a:ext uri="{FF2B5EF4-FFF2-40B4-BE49-F238E27FC236}">
-                <a16:creationId xmlns:a16="http://schemas.microsoft.com/office/drawing/2014/main" id="{B5061354-F9A3-2BE0-ED9C-76C0BCCB0434}"/>
+          <p:cNvPr id="3" name="图片 2">
+            <a:extLst>
+              <a:ext uri="{FF2B5EF4-FFF2-40B4-BE49-F238E27FC236}">
+                <a16:creationId xmlns:a16="http://schemas.microsoft.com/office/drawing/2014/main" id="{311A1ED9-8362-A7A9-8996-C6AB09E865B4}"/>
               </a:ext>
             </a:extLst>
           </p:cNvPr>
           <p:cNvPicPr>
-            <a:picLocks/>
+            <a:picLocks noChangeAspect="1"/>
           </p:cNvPicPr>
           <p:nvPr/>
         </p:nvPicPr>
         <p:blipFill>
-          <a:blip r:embed="rId2">
-            <a:extLst>
-              <a:ext uri="{28A0092B-C50C-407E-A947-70E740481C1C}">
-                <a14:useLocalDpi xmlns:a14="http://schemas.microsoft.com/office/drawing/2010/main" val="0"/>
-              </a:ext>
-            </a:extLst>
-          </a:blip>
-          <a:srcRect t="29985" b="27316"/>
+          <a:blip r:embed="rId2"/>
           <a:stretch>
             <a:fillRect/>
           </a:stretch>
         </p:blipFill>
         <p:spPr>
           <a:xfrm>
-            <a:off x="184195" y="166221"/>
-            <a:ext cx="1741461" cy="688543"/>
+            <a:off x="184195" y="111507"/>
+            <a:ext cx="1741460" cy="586009"/>
           </a:xfrm>
           <a:prstGeom prst="rect">
             <a:avLst/>
@@ -5251,35 +5209,28 @@
       </p:sp>
       <p:pic>
         <p:nvPicPr>
-          <p:cNvPr id="2" name="图片 1" descr="徽标&#10;&#10;AI 生成的内容可能不正确。">
-            <a:extLst>
-              <a:ext uri="{FF2B5EF4-FFF2-40B4-BE49-F238E27FC236}">
-                <a16:creationId xmlns:a16="http://schemas.microsoft.com/office/drawing/2014/main" id="{7E76806C-5B39-1A83-00B9-CD912A7B7456}"/>
+          <p:cNvPr id="3" name="图片 2">
+            <a:extLst>
+              <a:ext uri="{FF2B5EF4-FFF2-40B4-BE49-F238E27FC236}">
+                <a16:creationId xmlns:a16="http://schemas.microsoft.com/office/drawing/2014/main" id="{AFEEED35-E66A-B90B-442F-91F6BB609DDF}"/>
               </a:ext>
             </a:extLst>
           </p:cNvPr>
           <p:cNvPicPr>
-            <a:picLocks/>
+            <a:picLocks noChangeAspect="1"/>
           </p:cNvPicPr>
           <p:nvPr/>
         </p:nvPicPr>
         <p:blipFill>
-          <a:blip r:embed="rId2">
-            <a:extLst>
-              <a:ext uri="{28A0092B-C50C-407E-A947-70E740481C1C}">
-                <a14:useLocalDpi xmlns:a14="http://schemas.microsoft.com/office/drawing/2010/main" val="0"/>
-              </a:ext>
-            </a:extLst>
-          </a:blip>
-          <a:srcRect t="29985" b="27316"/>
+          <a:blip r:embed="rId2"/>
           <a:stretch>
             <a:fillRect/>
           </a:stretch>
         </p:blipFill>
         <p:spPr>
           <a:xfrm>
-            <a:off x="184195" y="166221"/>
-            <a:ext cx="1741461" cy="688543"/>
+            <a:off x="184195" y="111507"/>
+            <a:ext cx="1741460" cy="586009"/>
           </a:xfrm>
           <a:prstGeom prst="rect">
             <a:avLst/>
@@ -5505,35 +5456,28 @@
       </p:sp>
       <p:pic>
         <p:nvPicPr>
-          <p:cNvPr id="2" name="图片 1" descr="徽标&#10;&#10;AI 生成的内容可能不正确。">
-            <a:extLst>
-              <a:ext uri="{FF2B5EF4-FFF2-40B4-BE49-F238E27FC236}">
-                <a16:creationId xmlns:a16="http://schemas.microsoft.com/office/drawing/2014/main" id="{8A69AECE-4034-0ECF-5BAE-6438F6D28555}"/>
+          <p:cNvPr id="3" name="图片 2">
+            <a:extLst>
+              <a:ext uri="{FF2B5EF4-FFF2-40B4-BE49-F238E27FC236}">
+                <a16:creationId xmlns:a16="http://schemas.microsoft.com/office/drawing/2014/main" id="{E12C3C7F-93A5-5207-5D82-C64F942F054D}"/>
               </a:ext>
             </a:extLst>
           </p:cNvPr>
           <p:cNvPicPr>
-            <a:picLocks/>
+            <a:picLocks noChangeAspect="1"/>
           </p:cNvPicPr>
           <p:nvPr/>
         </p:nvPicPr>
         <p:blipFill>
-          <a:blip r:embed="rId2">
-            <a:extLst>
-              <a:ext uri="{28A0092B-C50C-407E-A947-70E740481C1C}">
-                <a14:useLocalDpi xmlns:a14="http://schemas.microsoft.com/office/drawing/2010/main" val="0"/>
-              </a:ext>
-            </a:extLst>
-          </a:blip>
-          <a:srcRect t="29985" b="27316"/>
+          <a:blip r:embed="rId2"/>
           <a:stretch>
             <a:fillRect/>
           </a:stretch>
         </p:blipFill>
         <p:spPr>
           <a:xfrm>
-            <a:off x="184195" y="166221"/>
-            <a:ext cx="1741461" cy="688543"/>
+            <a:off x="184195" y="111507"/>
+            <a:ext cx="1741460" cy="586009"/>
           </a:xfrm>
           <a:prstGeom prst="rect">
             <a:avLst/>
@@ -5759,35 +5703,28 @@
       </p:sp>
       <p:pic>
         <p:nvPicPr>
-          <p:cNvPr id="2" name="图片 1" descr="徽标&#10;&#10;AI 生成的内容可能不正确。">
-            <a:extLst>
-              <a:ext uri="{FF2B5EF4-FFF2-40B4-BE49-F238E27FC236}">
-                <a16:creationId xmlns:a16="http://schemas.microsoft.com/office/drawing/2014/main" id="{0E2EF0C2-B482-72A2-E97F-8759F4886884}"/>
+          <p:cNvPr id="3" name="图片 2">
+            <a:extLst>
+              <a:ext uri="{FF2B5EF4-FFF2-40B4-BE49-F238E27FC236}">
+                <a16:creationId xmlns:a16="http://schemas.microsoft.com/office/drawing/2014/main" id="{24414579-203C-59C3-FA68-F83A15BC8142}"/>
               </a:ext>
             </a:extLst>
           </p:cNvPr>
           <p:cNvPicPr>
-            <a:picLocks/>
+            <a:picLocks noChangeAspect="1"/>
           </p:cNvPicPr>
           <p:nvPr/>
         </p:nvPicPr>
         <p:blipFill>
-          <a:blip r:embed="rId2">
-            <a:extLst>
-              <a:ext uri="{28A0092B-C50C-407E-A947-70E740481C1C}">
-                <a14:useLocalDpi xmlns:a14="http://schemas.microsoft.com/office/drawing/2010/main" val="0"/>
-              </a:ext>
-            </a:extLst>
-          </a:blip>
-          <a:srcRect t="29985" b="27316"/>
+          <a:blip r:embed="rId2"/>
           <a:stretch>
             <a:fillRect/>
           </a:stretch>
         </p:blipFill>
         <p:spPr>
           <a:xfrm>
-            <a:off x="184195" y="166221"/>
-            <a:ext cx="1741461" cy="688543"/>
+            <a:off x="184195" y="111507"/>
+            <a:ext cx="1741460" cy="586009"/>
           </a:xfrm>
           <a:prstGeom prst="rect">
             <a:avLst/>
@@ -6051,7 +5988,7 @@
                 <a:latin typeface="Arial" panose="020B0604020202020204" pitchFamily="34" charset="0"/>
                 <a:cs typeface="Arial" panose="020B0604020202020204" pitchFamily="34" charset="0"/>
               </a:rPr>
-              <a:t>11/14/2025 10:59:11 AM</a:t>
+              <a:t>7/6/2026 6:25:22 PM</a:t>
             </a:fld>
             <a:endParaRPr lang="zh-CN" altLang="en-US" sz="1400" b="1" dirty="0">
               <a:solidFill>
@@ -6101,35 +6038,28 @@
       </p:sp>
       <p:pic>
         <p:nvPicPr>
-          <p:cNvPr id="2" name="图片 1" descr="徽标&#10;&#10;AI 生成的内容可能不正确。">
-            <a:extLst>
-              <a:ext uri="{FF2B5EF4-FFF2-40B4-BE49-F238E27FC236}">
-                <a16:creationId xmlns:a16="http://schemas.microsoft.com/office/drawing/2014/main" id="{D479C517-B26F-2B51-F795-C70E5193054B}"/>
+          <p:cNvPr id="3" name="图片 2">
+            <a:extLst>
+              <a:ext uri="{FF2B5EF4-FFF2-40B4-BE49-F238E27FC236}">
+                <a16:creationId xmlns:a16="http://schemas.microsoft.com/office/drawing/2014/main" id="{E25FDF1F-4C18-F423-643F-FC51D1280085}"/>
               </a:ext>
             </a:extLst>
           </p:cNvPr>
           <p:cNvPicPr>
-            <a:picLocks/>
+            <a:picLocks noChangeAspect="1"/>
           </p:cNvPicPr>
           <p:nvPr/>
         </p:nvPicPr>
         <p:blipFill>
-          <a:blip r:embed="rId2">
-            <a:extLst>
-              <a:ext uri="{28A0092B-C50C-407E-A947-70E740481C1C}">
-                <a14:useLocalDpi xmlns:a14="http://schemas.microsoft.com/office/drawing/2010/main" val="0"/>
-              </a:ext>
-            </a:extLst>
-          </a:blip>
-          <a:srcRect t="29985" b="27316"/>
+          <a:blip r:embed="rId2"/>
           <a:stretch>
             <a:fillRect/>
           </a:stretch>
         </p:blipFill>
         <p:spPr>
           <a:xfrm>
-            <a:off x="184195" y="166221"/>
-            <a:ext cx="1741461" cy="688543"/>
+            <a:off x="184195" y="111507"/>
+            <a:ext cx="1741460" cy="586009"/>
           </a:xfrm>
           <a:prstGeom prst="rect">
             <a:avLst/>
@@ -6355,35 +6285,28 @@
       </p:sp>
       <p:pic>
         <p:nvPicPr>
-          <p:cNvPr id="2" name="图片 1" descr="徽标&#10;&#10;AI 生成的内容可能不正确。">
-            <a:extLst>
-              <a:ext uri="{FF2B5EF4-FFF2-40B4-BE49-F238E27FC236}">
-                <a16:creationId xmlns:a16="http://schemas.microsoft.com/office/drawing/2014/main" id="{2F1D7FFF-1DBB-093E-4127-CA20C94203E3}"/>
+          <p:cNvPr id="3" name="图片 2">
+            <a:extLst>
+              <a:ext uri="{FF2B5EF4-FFF2-40B4-BE49-F238E27FC236}">
+                <a16:creationId xmlns:a16="http://schemas.microsoft.com/office/drawing/2014/main" id="{64DC48EC-8912-5377-84F9-B9BAA6D261F8}"/>
               </a:ext>
             </a:extLst>
           </p:cNvPr>
           <p:cNvPicPr>
-            <a:picLocks/>
+            <a:picLocks noChangeAspect="1"/>
           </p:cNvPicPr>
           <p:nvPr/>
         </p:nvPicPr>
         <p:blipFill>
-          <a:blip r:embed="rId2">
-            <a:extLst>
-              <a:ext uri="{28A0092B-C50C-407E-A947-70E740481C1C}">
-                <a14:useLocalDpi xmlns:a14="http://schemas.microsoft.com/office/drawing/2010/main" val="0"/>
-              </a:ext>
-            </a:extLst>
-          </a:blip>
-          <a:srcRect t="29985" b="27316"/>
+          <a:blip r:embed="rId2"/>
           <a:stretch>
             <a:fillRect/>
           </a:stretch>
         </p:blipFill>
         <p:spPr>
           <a:xfrm>
-            <a:off x="184195" y="166221"/>
-            <a:ext cx="1741461" cy="688543"/>
+            <a:off x="184195" y="111507"/>
+            <a:ext cx="1741460" cy="586009"/>
           </a:xfrm>
           <a:prstGeom prst="rect">
             <a:avLst/>
@@ -7065,35 +6988,28 @@
       </p:sp>
       <p:pic>
         <p:nvPicPr>
-          <p:cNvPr id="5" name="图片 4" descr="徽标&#10;&#10;AI 生成的内容可能不正确。">
-            <a:extLst>
-              <a:ext uri="{FF2B5EF4-FFF2-40B4-BE49-F238E27FC236}">
-                <a16:creationId xmlns:a16="http://schemas.microsoft.com/office/drawing/2014/main" id="{23FDCDAC-9819-1467-236D-5C581296920A}"/>
+          <p:cNvPr id="17" name="图片 16">
+            <a:extLst>
+              <a:ext uri="{FF2B5EF4-FFF2-40B4-BE49-F238E27FC236}">
+                <a16:creationId xmlns:a16="http://schemas.microsoft.com/office/drawing/2014/main" id="{261416FB-6877-BA3A-2BB4-B4ACD0FA2073}"/>
               </a:ext>
             </a:extLst>
           </p:cNvPr>
           <p:cNvPicPr>
-            <a:picLocks/>
+            <a:picLocks noChangeAspect="1"/>
           </p:cNvPicPr>
           <p:nvPr/>
         </p:nvPicPr>
         <p:blipFill>
-          <a:blip r:embed="rId2">
-            <a:extLst>
-              <a:ext uri="{28A0092B-C50C-407E-A947-70E740481C1C}">
-                <a14:useLocalDpi xmlns:a14="http://schemas.microsoft.com/office/drawing/2010/main" val="0"/>
-              </a:ext>
-            </a:extLst>
-          </a:blip>
-          <a:srcRect t="29985" b="27316"/>
+          <a:blip r:embed="rId2"/>
           <a:stretch>
             <a:fillRect/>
           </a:stretch>
         </p:blipFill>
         <p:spPr>
           <a:xfrm>
-            <a:off x="184195" y="166221"/>
-            <a:ext cx="1741461" cy="688543"/>
+            <a:off x="184195" y="111507"/>
+            <a:ext cx="1741460" cy="586009"/>
           </a:xfrm>
           <a:prstGeom prst="rect">
             <a:avLst/>
@@ -7307,35 +7223,28 @@
       </p:sp>
       <p:pic>
         <p:nvPicPr>
-          <p:cNvPr id="2" name="图片 1" descr="徽标&#10;&#10;AI 生成的内容可能不正确。">
-            <a:extLst>
-              <a:ext uri="{FF2B5EF4-FFF2-40B4-BE49-F238E27FC236}">
-                <a16:creationId xmlns:a16="http://schemas.microsoft.com/office/drawing/2014/main" id="{2121F946-A03C-5F56-A4C7-A01BD4814C86}"/>
+          <p:cNvPr id="3" name="图片 2">
+            <a:extLst>
+              <a:ext uri="{FF2B5EF4-FFF2-40B4-BE49-F238E27FC236}">
+                <a16:creationId xmlns:a16="http://schemas.microsoft.com/office/drawing/2014/main" id="{C44F7B69-1BBD-981C-790A-D846AA78A965}"/>
               </a:ext>
             </a:extLst>
           </p:cNvPr>
           <p:cNvPicPr>
-            <a:picLocks/>
+            <a:picLocks noChangeAspect="1"/>
           </p:cNvPicPr>
           <p:nvPr/>
         </p:nvPicPr>
         <p:blipFill>
-          <a:blip r:embed="rId2">
-            <a:extLst>
-              <a:ext uri="{28A0092B-C50C-407E-A947-70E740481C1C}">
-                <a14:useLocalDpi xmlns:a14="http://schemas.microsoft.com/office/drawing/2010/main" val="0"/>
-              </a:ext>
-            </a:extLst>
-          </a:blip>
-          <a:srcRect t="29985" b="27316"/>
+          <a:blip r:embed="rId2"/>
           <a:stretch>
             <a:fillRect/>
           </a:stretch>
         </p:blipFill>
         <p:spPr>
           <a:xfrm>
-            <a:off x="184195" y="166221"/>
-            <a:ext cx="1741461" cy="688543"/>
+            <a:off x="184195" y="111507"/>
+            <a:ext cx="1741460" cy="586009"/>
           </a:xfrm>
           <a:prstGeom prst="rect">
             <a:avLst/>
@@ -7561,35 +7470,28 @@
       </p:sp>
       <p:pic>
         <p:nvPicPr>
-          <p:cNvPr id="2" name="图片 1" descr="徽标&#10;&#10;AI 生成的内容可能不正确。">
-            <a:extLst>
-              <a:ext uri="{FF2B5EF4-FFF2-40B4-BE49-F238E27FC236}">
-                <a16:creationId xmlns:a16="http://schemas.microsoft.com/office/drawing/2014/main" id="{D5019EFD-ED7A-6836-CBB9-E8E85CEE20DA}"/>
+          <p:cNvPr id="3" name="图片 2">
+            <a:extLst>
+              <a:ext uri="{FF2B5EF4-FFF2-40B4-BE49-F238E27FC236}">
+                <a16:creationId xmlns:a16="http://schemas.microsoft.com/office/drawing/2014/main" id="{6C2343D6-DC2A-66E4-73BE-2EA47D6CDC1C}"/>
               </a:ext>
             </a:extLst>
           </p:cNvPr>
           <p:cNvPicPr>
-            <a:picLocks/>
+            <a:picLocks noChangeAspect="1"/>
           </p:cNvPicPr>
           <p:nvPr/>
         </p:nvPicPr>
         <p:blipFill>
-          <a:blip r:embed="rId2">
-            <a:extLst>
-              <a:ext uri="{28A0092B-C50C-407E-A947-70E740481C1C}">
-                <a14:useLocalDpi xmlns:a14="http://schemas.microsoft.com/office/drawing/2010/main" val="0"/>
-              </a:ext>
-            </a:extLst>
-          </a:blip>
-          <a:srcRect t="29985" b="27316"/>
+          <a:blip r:embed="rId2"/>
           <a:stretch>
             <a:fillRect/>
           </a:stretch>
         </p:blipFill>
         <p:spPr>
           <a:xfrm>
-            <a:off x="184195" y="166221"/>
-            <a:ext cx="1741461" cy="688543"/>
+            <a:off x="184195" y="111507"/>
+            <a:ext cx="1741460" cy="586009"/>
           </a:xfrm>
           <a:prstGeom prst="rect">
             <a:avLst/>
@@ -7815,35 +7717,28 @@
       </p:sp>
       <p:pic>
         <p:nvPicPr>
-          <p:cNvPr id="2" name="图片 1" descr="徽标&#10;&#10;AI 生成的内容可能不正确。">
-            <a:extLst>
-              <a:ext uri="{FF2B5EF4-FFF2-40B4-BE49-F238E27FC236}">
-                <a16:creationId xmlns:a16="http://schemas.microsoft.com/office/drawing/2014/main" id="{EC19D602-CD34-259A-F331-2BF243A9F7FD}"/>
+          <p:cNvPr id="3" name="图片 2">
+            <a:extLst>
+              <a:ext uri="{FF2B5EF4-FFF2-40B4-BE49-F238E27FC236}">
+                <a16:creationId xmlns:a16="http://schemas.microsoft.com/office/drawing/2014/main" id="{0386390C-3E1F-6208-EF35-DDF8684501C4}"/>
               </a:ext>
             </a:extLst>
           </p:cNvPr>
           <p:cNvPicPr>
-            <a:picLocks/>
+            <a:picLocks noChangeAspect="1"/>
           </p:cNvPicPr>
           <p:nvPr/>
         </p:nvPicPr>
         <p:blipFill>
-          <a:blip r:embed="rId2">
-            <a:extLst>
-              <a:ext uri="{28A0092B-C50C-407E-A947-70E740481C1C}">
-                <a14:useLocalDpi xmlns:a14="http://schemas.microsoft.com/office/drawing/2010/main" val="0"/>
-              </a:ext>
-            </a:extLst>
-          </a:blip>
-          <a:srcRect t="29985" b="27316"/>
+          <a:blip r:embed="rId2"/>
           <a:stretch>
             <a:fillRect/>
           </a:stretch>
         </p:blipFill>
         <p:spPr>
           <a:xfrm>
-            <a:off x="184195" y="166221"/>
-            <a:ext cx="1741461" cy="688543"/>
+            <a:off x="184195" y="111507"/>
+            <a:ext cx="1741460" cy="586009"/>
           </a:xfrm>
           <a:prstGeom prst="rect">
             <a:avLst/>
@@ -8067,7 +7962,7 @@
                 <a:latin typeface="Arial" panose="020B0604020202020204" pitchFamily="34" charset="0"/>
                 <a:cs typeface="Arial" panose="020B0604020202020204" pitchFamily="34" charset="0"/>
               </a:rPr>
-              <a:t>11/14/2025 11:00:18 AM</a:t>
+              <a:t>7/6/2026 6:25:34 PM</a:t>
             </a:fld>
             <a:endParaRPr lang="zh-CN" altLang="en-US" sz="1400" b="1" dirty="0">
               <a:solidFill>
@@ -8117,35 +8012,28 @@
       </p:sp>
       <p:pic>
         <p:nvPicPr>
-          <p:cNvPr id="2" name="图片 1" descr="徽标&#10;&#10;AI 生成的内容可能不正确。">
-            <a:extLst>
-              <a:ext uri="{FF2B5EF4-FFF2-40B4-BE49-F238E27FC236}">
-                <a16:creationId xmlns:a16="http://schemas.microsoft.com/office/drawing/2014/main" id="{19297531-6A0F-36BF-9120-D184A0E0E289}"/>
+          <p:cNvPr id="3" name="图片 2">
+            <a:extLst>
+              <a:ext uri="{FF2B5EF4-FFF2-40B4-BE49-F238E27FC236}">
+                <a16:creationId xmlns:a16="http://schemas.microsoft.com/office/drawing/2014/main" id="{02492B44-DD2B-5C1A-B3EA-39328127ECA4}"/>
               </a:ext>
             </a:extLst>
           </p:cNvPr>
           <p:cNvPicPr>
-            <a:picLocks/>
+            <a:picLocks noChangeAspect="1"/>
           </p:cNvPicPr>
           <p:nvPr/>
         </p:nvPicPr>
         <p:blipFill>
-          <a:blip r:embed="rId2">
-            <a:extLst>
-              <a:ext uri="{28A0092B-C50C-407E-A947-70E740481C1C}">
-                <a14:useLocalDpi xmlns:a14="http://schemas.microsoft.com/office/drawing/2010/main" val="0"/>
-              </a:ext>
-            </a:extLst>
-          </a:blip>
-          <a:srcRect t="29985" b="27316"/>
+          <a:blip r:embed="rId2"/>
           <a:stretch>
             <a:fillRect/>
           </a:stretch>
         </p:blipFill>
         <p:spPr>
           <a:xfrm>
-            <a:off x="184195" y="166221"/>
-            <a:ext cx="1741461" cy="688543"/>
+            <a:off x="184195" y="111507"/>
+            <a:ext cx="1741460" cy="586009"/>
           </a:xfrm>
           <a:prstGeom prst="rect">
             <a:avLst/>
@@ -8371,35 +8259,28 @@
       </p:sp>
       <p:pic>
         <p:nvPicPr>
-          <p:cNvPr id="2" name="图片 1" descr="徽标&#10;&#10;AI 生成的内容可能不正确。">
-            <a:extLst>
-              <a:ext uri="{FF2B5EF4-FFF2-40B4-BE49-F238E27FC236}">
-                <a16:creationId xmlns:a16="http://schemas.microsoft.com/office/drawing/2014/main" id="{FFB78861-4A09-C437-C68A-84D150DD9691}"/>
+          <p:cNvPr id="3" name="图片 2">
+            <a:extLst>
+              <a:ext uri="{FF2B5EF4-FFF2-40B4-BE49-F238E27FC236}">
+                <a16:creationId xmlns:a16="http://schemas.microsoft.com/office/drawing/2014/main" id="{CFE7D64D-784C-B2AE-6A67-2BF9E2D4A2AD}"/>
               </a:ext>
             </a:extLst>
           </p:cNvPr>
           <p:cNvPicPr>
-            <a:picLocks/>
+            <a:picLocks noChangeAspect="1"/>
           </p:cNvPicPr>
           <p:nvPr/>
         </p:nvPicPr>
         <p:blipFill>
-          <a:blip r:embed="rId2">
-            <a:extLst>
-              <a:ext uri="{28A0092B-C50C-407E-A947-70E740481C1C}">
-                <a14:useLocalDpi xmlns:a14="http://schemas.microsoft.com/office/drawing/2010/main" val="0"/>
-              </a:ext>
-            </a:extLst>
-          </a:blip>
-          <a:srcRect t="29985" b="27316"/>
+          <a:blip r:embed="rId2"/>
           <a:stretch>
             <a:fillRect/>
           </a:stretch>
         </p:blipFill>
         <p:spPr>
           <a:xfrm>
-            <a:off x="184195" y="166221"/>
-            <a:ext cx="1741461" cy="688543"/>
+            <a:off x="184195" y="111507"/>
+            <a:ext cx="1741460" cy="586009"/>
           </a:xfrm>
           <a:prstGeom prst="rect">
             <a:avLst/>
@@ -8680,7 +8561,7 @@
                 <a:latin typeface="Arial" panose="020B0604020202020204" pitchFamily="34" charset="0"/>
                 <a:cs typeface="Arial" panose="020B0604020202020204" pitchFamily="34" charset="0"/>
               </a:rPr>
-              <a:t>11/14/2025 10:56:04 AM</a:t>
+              <a:t>7/6/2026 6:24:46 PM</a:t>
             </a:fld>
             <a:endParaRPr lang="zh-CN" altLang="en-US" sz="1400" b="1" dirty="0">
               <a:solidFill>
@@ -8730,35 +8611,28 @@
       </p:sp>
       <p:pic>
         <p:nvPicPr>
-          <p:cNvPr id="2" name="图片 1" descr="徽标&#10;&#10;AI 生成的内容可能不正确。">
-            <a:extLst>
-              <a:ext uri="{FF2B5EF4-FFF2-40B4-BE49-F238E27FC236}">
-                <a16:creationId xmlns:a16="http://schemas.microsoft.com/office/drawing/2014/main" id="{900EBE30-110E-570C-A17B-1357D01287EF}"/>
+          <p:cNvPr id="3" name="图片 2">
+            <a:extLst>
+              <a:ext uri="{FF2B5EF4-FFF2-40B4-BE49-F238E27FC236}">
+                <a16:creationId xmlns:a16="http://schemas.microsoft.com/office/drawing/2014/main" id="{EFD73AC0-64E2-6011-7503-5C4E3311399E}"/>
               </a:ext>
             </a:extLst>
           </p:cNvPr>
           <p:cNvPicPr>
-            <a:picLocks/>
+            <a:picLocks noChangeAspect="1"/>
           </p:cNvPicPr>
           <p:nvPr/>
         </p:nvPicPr>
         <p:blipFill>
-          <a:blip r:embed="rId2">
-            <a:extLst>
-              <a:ext uri="{28A0092B-C50C-407E-A947-70E740481C1C}">
-                <a14:useLocalDpi xmlns:a14="http://schemas.microsoft.com/office/drawing/2010/main" val="0"/>
-              </a:ext>
-            </a:extLst>
-          </a:blip>
-          <a:srcRect t="29985" b="27316"/>
+          <a:blip r:embed="rId2"/>
           <a:stretch>
             <a:fillRect/>
           </a:stretch>
         </p:blipFill>
         <p:spPr>
           <a:xfrm>
-            <a:off x="184195" y="166221"/>
-            <a:ext cx="1741461" cy="688543"/>
+            <a:off x="184195" y="111507"/>
+            <a:ext cx="1741460" cy="586009"/>
           </a:xfrm>
           <a:prstGeom prst="rect">
             <a:avLst/>
@@ -8984,35 +8858,28 @@
       </p:sp>
       <p:pic>
         <p:nvPicPr>
-          <p:cNvPr id="2" name="图片 1" descr="徽标&#10;&#10;AI 生成的内容可能不正确。">
-            <a:extLst>
-              <a:ext uri="{FF2B5EF4-FFF2-40B4-BE49-F238E27FC236}">
-                <a16:creationId xmlns:a16="http://schemas.microsoft.com/office/drawing/2014/main" id="{CC053D65-26B9-B441-0558-973847037A37}"/>
+          <p:cNvPr id="3" name="图片 2">
+            <a:extLst>
+              <a:ext uri="{FF2B5EF4-FFF2-40B4-BE49-F238E27FC236}">
+                <a16:creationId xmlns:a16="http://schemas.microsoft.com/office/drawing/2014/main" id="{D6418F73-08AD-6D72-0DD8-C771394BF5E3}"/>
               </a:ext>
             </a:extLst>
           </p:cNvPr>
           <p:cNvPicPr>
-            <a:picLocks/>
+            <a:picLocks noChangeAspect="1"/>
           </p:cNvPicPr>
           <p:nvPr/>
         </p:nvPicPr>
         <p:blipFill>
-          <a:blip r:embed="rId2">
-            <a:extLst>
-              <a:ext uri="{28A0092B-C50C-407E-A947-70E740481C1C}">
-                <a14:useLocalDpi xmlns:a14="http://schemas.microsoft.com/office/drawing/2010/main" val="0"/>
-              </a:ext>
-            </a:extLst>
-          </a:blip>
-          <a:srcRect t="29985" b="27316"/>
+          <a:blip r:embed="rId2"/>
           <a:stretch>
             <a:fillRect/>
           </a:stretch>
         </p:blipFill>
         <p:spPr>
           <a:xfrm>
-            <a:off x="184195" y="166221"/>
-            <a:ext cx="1741461" cy="688543"/>
+            <a:off x="184195" y="111507"/>
+            <a:ext cx="1741460" cy="586009"/>
           </a:xfrm>
           <a:prstGeom prst="rect">
             <a:avLst/>
@@ -9238,35 +9105,28 @@
       </p:sp>
       <p:pic>
         <p:nvPicPr>
-          <p:cNvPr id="2" name="图片 1" descr="徽标&#10;&#10;AI 生成的内容可能不正确。">
-            <a:extLst>
-              <a:ext uri="{FF2B5EF4-FFF2-40B4-BE49-F238E27FC236}">
-                <a16:creationId xmlns:a16="http://schemas.microsoft.com/office/drawing/2014/main" id="{DCC1C085-F0FF-C0AC-0678-89EEF1FE91B9}"/>
+          <p:cNvPr id="3" name="图片 2">
+            <a:extLst>
+              <a:ext uri="{FF2B5EF4-FFF2-40B4-BE49-F238E27FC236}">
+                <a16:creationId xmlns:a16="http://schemas.microsoft.com/office/drawing/2014/main" id="{C7583846-E34D-4EC8-A84F-1347D8343827}"/>
               </a:ext>
             </a:extLst>
           </p:cNvPr>
           <p:cNvPicPr>
-            <a:picLocks/>
+            <a:picLocks noChangeAspect="1"/>
           </p:cNvPicPr>
           <p:nvPr/>
         </p:nvPicPr>
         <p:blipFill>
-          <a:blip r:embed="rId2">
-            <a:extLst>
-              <a:ext uri="{28A0092B-C50C-407E-A947-70E740481C1C}">
-                <a14:useLocalDpi xmlns:a14="http://schemas.microsoft.com/office/drawing/2010/main" val="0"/>
-              </a:ext>
-            </a:extLst>
-          </a:blip>
-          <a:srcRect t="29985" b="27316"/>
+          <a:blip r:embed="rId2"/>
           <a:stretch>
             <a:fillRect/>
           </a:stretch>
         </p:blipFill>
         <p:spPr>
           <a:xfrm>
-            <a:off x="184195" y="166221"/>
-            <a:ext cx="1741461" cy="688543"/>
+            <a:off x="184195" y="111507"/>
+            <a:ext cx="1741460" cy="586009"/>
           </a:xfrm>
           <a:prstGeom prst="rect">
             <a:avLst/>
@@ -9492,35 +9352,28 @@
       </p:sp>
       <p:pic>
         <p:nvPicPr>
-          <p:cNvPr id="2" name="图片 1" descr="徽标&#10;&#10;AI 生成的内容可能不正确。">
-            <a:extLst>
-              <a:ext uri="{FF2B5EF4-FFF2-40B4-BE49-F238E27FC236}">
-                <a16:creationId xmlns:a16="http://schemas.microsoft.com/office/drawing/2014/main" id="{0220A979-C458-F381-70DD-7545ABF92D50}"/>
+          <p:cNvPr id="3" name="图片 2">
+            <a:extLst>
+              <a:ext uri="{FF2B5EF4-FFF2-40B4-BE49-F238E27FC236}">
+                <a16:creationId xmlns:a16="http://schemas.microsoft.com/office/drawing/2014/main" id="{3AC7E6CA-8BCE-2E30-F555-C4C41C7C9B5F}"/>
               </a:ext>
             </a:extLst>
           </p:cNvPr>
           <p:cNvPicPr>
-            <a:picLocks/>
+            <a:picLocks noChangeAspect="1"/>
           </p:cNvPicPr>
           <p:nvPr/>
         </p:nvPicPr>
         <p:blipFill>
-          <a:blip r:embed="rId2">
-            <a:extLst>
-              <a:ext uri="{28A0092B-C50C-407E-A947-70E740481C1C}">
-                <a14:useLocalDpi xmlns:a14="http://schemas.microsoft.com/office/drawing/2010/main" val="0"/>
-              </a:ext>
-            </a:extLst>
-          </a:blip>
-          <a:srcRect t="29985" b="27316"/>
+          <a:blip r:embed="rId2"/>
           <a:stretch>
             <a:fillRect/>
           </a:stretch>
         </p:blipFill>
         <p:spPr>
           <a:xfrm>
-            <a:off x="184195" y="166221"/>
-            <a:ext cx="1741461" cy="688543"/>
+            <a:off x="184195" y="111507"/>
+            <a:ext cx="1741460" cy="586009"/>
           </a:xfrm>
           <a:prstGeom prst="rect">
             <a:avLst/>
@@ -9746,35 +9599,28 @@
       </p:sp>
       <p:pic>
         <p:nvPicPr>
-          <p:cNvPr id="5" name="图片 4" descr="徽标&#10;&#10;AI 生成的内容可能不正确。">
-            <a:extLst>
-              <a:ext uri="{FF2B5EF4-FFF2-40B4-BE49-F238E27FC236}">
-                <a16:creationId xmlns:a16="http://schemas.microsoft.com/office/drawing/2014/main" id="{0CACB1C6-241D-0451-D06E-FF9F4A4E09EE}"/>
+          <p:cNvPr id="2" name="图片 1">
+            <a:extLst>
+              <a:ext uri="{FF2B5EF4-FFF2-40B4-BE49-F238E27FC236}">
+                <a16:creationId xmlns:a16="http://schemas.microsoft.com/office/drawing/2014/main" id="{0A029E07-E7D9-E61D-D5E7-D363F1EDBDA1}"/>
               </a:ext>
             </a:extLst>
           </p:cNvPr>
           <p:cNvPicPr>
-            <a:picLocks/>
+            <a:picLocks noChangeAspect="1"/>
           </p:cNvPicPr>
           <p:nvPr/>
         </p:nvPicPr>
         <p:blipFill>
-          <a:blip r:embed="rId2">
-            <a:extLst>
-              <a:ext uri="{28A0092B-C50C-407E-A947-70E740481C1C}">
-                <a14:useLocalDpi xmlns:a14="http://schemas.microsoft.com/office/drawing/2010/main" val="0"/>
-              </a:ext>
-            </a:extLst>
-          </a:blip>
-          <a:srcRect t="29985" b="27316"/>
+          <a:blip r:embed="rId2"/>
           <a:stretch>
             <a:fillRect/>
           </a:stretch>
         </p:blipFill>
         <p:spPr>
           <a:xfrm>
-            <a:off x="184195" y="166221"/>
-            <a:ext cx="1741461" cy="688543"/>
+            <a:off x="184195" y="111507"/>
+            <a:ext cx="1741460" cy="586009"/>
           </a:xfrm>
           <a:prstGeom prst="rect">
             <a:avLst/>
@@ -10055,7 +9901,7 @@
                 <a:latin typeface="Arial" panose="020B0604020202020204" pitchFamily="34" charset="0"/>
                 <a:cs typeface="Arial" panose="020B0604020202020204" pitchFamily="34" charset="0"/>
               </a:rPr>
-              <a:t>11/14/2025 10:54:12 AM</a:t>
+              <a:t>7/6/2026 6:24:58 PM</a:t>
             </a:fld>
             <a:endParaRPr lang="zh-CN" altLang="en-US" sz="1400" b="1" dirty="0">
               <a:solidFill>
@@ -10105,10 +9951,10 @@
       </p:sp>
       <p:pic>
         <p:nvPicPr>
-          <p:cNvPr id="3" name="图片 2" descr="文本&#10;&#10;AI 生成的内容可能不正确。">
-            <a:extLst>
-              <a:ext uri="{FF2B5EF4-FFF2-40B4-BE49-F238E27FC236}">
-                <a16:creationId xmlns:a16="http://schemas.microsoft.com/office/drawing/2014/main" id="{9C019256-55CC-E25C-F092-A5AA10CA928F}"/>
+          <p:cNvPr id="2" name="图片 1">
+            <a:extLst>
+              <a:ext uri="{FF2B5EF4-FFF2-40B4-BE49-F238E27FC236}">
+                <a16:creationId xmlns:a16="http://schemas.microsoft.com/office/drawing/2014/main" id="{70F127E9-E6E6-ECE6-85FA-397F52188B05}"/>
               </a:ext>
             </a:extLst>
           </p:cNvPr>
@@ -10118,21 +9964,15 @@
           <p:nvPr/>
         </p:nvPicPr>
         <p:blipFill>
-          <a:blip r:embed="rId2">
-            <a:extLst>
-              <a:ext uri="{28A0092B-C50C-407E-A947-70E740481C1C}">
-                <a14:useLocalDpi xmlns:a14="http://schemas.microsoft.com/office/drawing/2010/main" val="0"/>
-              </a:ext>
-            </a:extLst>
-          </a:blip>
+          <a:blip r:embed="rId2"/>
           <a:stretch>
             <a:fillRect/>
           </a:stretch>
         </p:blipFill>
         <p:spPr>
           <a:xfrm>
-            <a:off x="50525" y="164735"/>
-            <a:ext cx="2008800" cy="648980"/>
+            <a:off x="184195" y="111507"/>
+            <a:ext cx="1741460" cy="586009"/>
           </a:xfrm>
           <a:prstGeom prst="rect">
             <a:avLst/>
@@ -10358,35 +10198,28 @@
       </p:sp>
       <p:pic>
         <p:nvPicPr>
-          <p:cNvPr id="2" name="图片 1" descr="徽标&#10;&#10;AI 生成的内容可能不正确。">
-            <a:extLst>
-              <a:ext uri="{FF2B5EF4-FFF2-40B4-BE49-F238E27FC236}">
-                <a16:creationId xmlns:a16="http://schemas.microsoft.com/office/drawing/2014/main" id="{515428D3-116D-6FA5-00BB-688F2357BF4F}"/>
+          <p:cNvPr id="3" name="图片 2">
+            <a:extLst>
+              <a:ext uri="{FF2B5EF4-FFF2-40B4-BE49-F238E27FC236}">
+                <a16:creationId xmlns:a16="http://schemas.microsoft.com/office/drawing/2014/main" id="{27B8407C-BBB8-0DC7-00E4-6ACC6D68E7A5}"/>
               </a:ext>
             </a:extLst>
           </p:cNvPr>
           <p:cNvPicPr>
-            <a:picLocks/>
+            <a:picLocks noChangeAspect="1"/>
           </p:cNvPicPr>
           <p:nvPr/>
         </p:nvPicPr>
         <p:blipFill>
-          <a:blip r:embed="rId2">
-            <a:extLst>
-              <a:ext uri="{28A0092B-C50C-407E-A947-70E740481C1C}">
-                <a14:useLocalDpi xmlns:a14="http://schemas.microsoft.com/office/drawing/2010/main" val="0"/>
-              </a:ext>
-            </a:extLst>
-          </a:blip>
-          <a:srcRect t="29985" b="27316"/>
+          <a:blip r:embed="rId2"/>
           <a:stretch>
             <a:fillRect/>
           </a:stretch>
         </p:blipFill>
         <p:spPr>
           <a:xfrm>
-            <a:off x="184195" y="166221"/>
-            <a:ext cx="1741461" cy="688543"/>
+            <a:off x="184195" y="111507"/>
+            <a:ext cx="1741460" cy="586009"/>
           </a:xfrm>
           <a:prstGeom prst="rect">
             <a:avLst/>
